--- a/library/a04-presentation-tools/a04-presentation-tools.pptx
+++ b/library/a04-presentation-tools/a04-presentation-tools.pptx
@@ -9972,7 +9972,7 @@
               <a:buNone/>
             </a:pPr>
             <a:r>
-              <a:rPr lang="en-US" sz="1050" b="1" dirty="0">
+              <a:rPr lang="en-US" sz="1000" b="1" dirty="0">
                 <a:solidFill>
                   <a:srgbClr val="555555"/>
                 </a:solidFill>
@@ -9983,7 +9983,7 @@
               <a:t>분석:</a:t>
             </a:r>
             <a:r>
-              <a:rPr lang="en-US" sz="1050" dirty="0">
+              <a:rPr lang="en-US" sz="1000" dirty="0">
                 <a:solidFill>
                   <a:srgbClr val="555555"/>
                 </a:solidFill>
@@ -10744,7 +10744,7 @@
               <a:buNone/>
             </a:pPr>
             <a:r>
-              <a:rPr lang="en-US" sz="1050" b="1" dirty="0">
+              <a:rPr lang="en-US" sz="1000" b="1" dirty="0">
                 <a:solidFill>
                   <a:srgbClr val="333333"/>
                 </a:solidFill>
@@ -10755,7 +10755,7 @@
               <a:t>분석:</a:t>
             </a:r>
             <a:r>
-              <a:rPr lang="en-US" sz="1050" dirty="0">
+              <a:rPr lang="en-US" sz="1000" dirty="0">
                 <a:solidFill>
                   <a:srgbClr val="333333"/>
                 </a:solidFill>
@@ -11516,7 +11516,7 @@
               <a:buNone/>
             </a:pPr>
             <a:r>
-              <a:rPr lang="en-US" sz="1050" b="1" dirty="0">
+              <a:rPr lang="en-US" sz="1000" b="1" dirty="0">
                 <a:solidFill>
                   <a:srgbClr val="555555"/>
                 </a:solidFill>
@@ -11527,7 +11527,7 @@
               <a:t>분석:</a:t>
             </a:r>
             <a:r>
-              <a:rPr lang="en-US" sz="1050" dirty="0">
+              <a:rPr lang="en-US" sz="1000" dirty="0">
                 <a:solidFill>
                   <a:srgbClr val="555555"/>
                 </a:solidFill>

--- a/library/a04-presentation-tools/a04-presentation-tools.pptx
+++ b/library/a04-presentation-tools/a04-presentation-tools.pptx
@@ -17720,7 +17720,7 @@
                 </a:solidFill>
                 <a:latin typeface="Pretendard"/>
               </a:rPr>
-              <a:t>1.  저작권 © 2026 이애본(드림아이티비즈 DreamIT Biz). 발행 홍문원(洪文院, 출판사 신고번호 제2026-000026호). 2026년 1월 「생성형 AI와 창의력·복합문제능력 향상 과정」 강의안을 전자출판용으로 다시 묶은 것입니다. ISBN: 등록 후 기재.</a:t>
+              <a:t>1.  저작권 © 2026 이애본(드림아이티비즈 DreamIT Biz). 발행 홍문원(洪文院, 출판사 신고번호 제2026-000026호). 이애본이 2026년 대학·기관 강의 현장에서 쓴 강의안을 전자출판용으로 다시 묶은 것입니다. ISBN: 등록 후 기재.</a:t>
             </a:r>
           </a:p>
           <a:p>
